--- a/public/fun/pack/pptx/familypro/가족소개프리미엄_38_3대가족_퓨터실버.pptx
+++ b/public/fun/pack/pptx/familypro/가족소개프리미엄_38_3대가족_퓨터실버.pptx
@@ -113,12 +113,12 @@
   <p:extLst>
     <p:ext uri="{521415D9-36F7-43E2-AB2F-B90AF26B5E84}">
       <p14:sectionLst xmlns:p14="http://schemas.microsoft.com/office/powerpoint/2010/main">
-        <p14:section name="시작" id="{8FE76876-E904-444D-B1D4-D43D339520AE}">
+        <p14:section name="시작" id="{4453050C-8D5E-4708-A7B5-FB3508F90E87}">
           <p14:sldIdLst>
             <p14:sldId id="256"/>
           </p14:sldIdLst>
         </p14:section>
-        <p14:section name="본문" id="{C5297F1B-878F-455B-B7FB-5798010DCF87}">
+        <p14:section name="본문" id="{A9E7A110-201A-4CBB-95F4-B5D7B3276BAE}">
           <p14:sldIdLst>
             <p14:sldId id="257"/>
             <p14:sldId id="258"/>
@@ -127,7 +127,7 @@
             <p14:sldId id="261"/>
           </p14:sldIdLst>
         </p14:section>
-        <p14:section name="마무리" id="{558C50E2-4F43-4EB3-87E1-5A2F377423BB}">
+        <p14:section name="마무리" id="{642FF20F-C033-47E4-941C-10FE96692DE3}">
           <p14:sldIdLst>
             <p14:sldId id="262"/>
           </p14:sldIdLst>
@@ -3021,7 +3021,7 @@
             </a:lvl1pPr>
           </a:lstStyle>
           <a:p>
-            <a:fld id="{89848CBA-65FA-4678-B8F2-A4DF4BC82006}" type="slidenum">
+            <a:fld id="{6F3E897F-378F-4B2D-B52B-9ED655D47E48}" type="slidenum">
               <a:rPr lang="en-US"/>
               <a:t>‹#›</a:t>
             </a:fld>
@@ -5817,7 +5817,7 @@
             </a:lvl1pPr>
           </a:lstStyle>
           <a:p>
-            <a:fld id="{118767DC-E49B-42F7-B1D8-A8A7B532B243}" type="slidenum">
+            <a:fld id="{237A5E16-6E6E-4810-88F9-18CFDC44F336}" type="slidenum">
               <a:rPr lang="en-US"/>
               <a:t>‹#›</a:t>
             </a:fld>
@@ -7107,7 +7107,7 @@
             </a:lvl1pPr>
           </a:lstStyle>
           <a:p>
-            <a:fld id="{7D20BE86-276A-4715-8571-B9FE2B7982A2}" type="slidenum">
+            <a:fld id="{7F964EC6-E4C4-499F-B920-FE51332669C9}" type="slidenum">
               <a:rPr lang="en-US"/>
               <a:t>‹#›</a:t>
             </a:fld>
@@ -8632,7 +8632,7 @@
           <a:p>
             <a:r>
               <a:rPr lang="ko-KR"/>
-              <a:t>3대 가족 · 0000. 00. 00</a:t>
+              <a:t>3대 가족 · 날짜 입력</a:t>
             </a:r>
           </a:p>
         </p:txBody>
@@ -9131,7 +9131,7 @@
           <a:bodyPr/>
           <a:lstStyle/>
           <a:p>
-            <a:fld id="{104A96FC-B700-4198-85BE-7221F47F9B79}" type="slidenum">
+            <a:fld id="{318A55CF-6DD2-4294-A1E7-AEDE186143B1}" type="slidenum">
               <a:rPr lang="en-US"/>
               <a:t>‹#›</a:t>
             </a:fld>
@@ -10323,7 +10323,7 @@
           <a:bodyPr/>
           <a:lstStyle/>
           <a:p>
-            <a:fld id="{6055188E-838B-49E8-AABE-720E28D41C85}" type="slidenum">
+            <a:fld id="{8C8E2BAE-680B-4246-8487-8099FAE7411E}" type="slidenum">
               <a:rPr lang="en-US"/>
               <a:t>‹#›</a:t>
             </a:fld>
@@ -11298,7 +11298,7 @@
           <a:bodyPr/>
           <a:lstStyle/>
           <a:p>
-            <a:fld id="{7FFAD2F1-DE00-4887-B51C-7BCD73809D07}" type="slidenum">
+            <a:fld id="{CB762BCA-EC90-4A23-815E-DEF1BD8B16EB}" type="slidenum">
               <a:rPr lang="en-US"/>
               <a:t>‹#›</a:t>
             </a:fld>
@@ -12664,7 +12664,7 @@
           <a:bodyPr/>
           <a:lstStyle/>
           <a:p>
-            <a:fld id="{6D6D5F71-D8F7-4B7D-9995-224F2819E9DB}" type="slidenum">
+            <a:fld id="{1B8C0D0E-B4BF-484E-BA25-DAEF1F9AD369}" type="slidenum">
               <a:rPr lang="en-US"/>
               <a:t>‹#›</a:t>
             </a:fld>
@@ -12752,7 +12752,7 @@
           <a:bodyPr/>
           <a:lstStyle/>
           <a:p>
-            <a:fld id="{8A824628-3CC2-4FF9-A40B-C0D2AA684E58}" type="slidenum">
+            <a:fld id="{B5E4F283-67EA-4883-8D7E-C9963D56F578}" type="slidenum">
               <a:rPr lang="en-US"/>
               <a:t>‹#›</a:t>
             </a:fld>
